--- a/media/SkillCoach_Submission.pptx
+++ b/media/SkillCoach_Submission.pptx
@@ -18,6 +18,9 @@
     <p:sldId id="264" r:id="rId14"/>
     <p:sldId id="265" r:id="rId15"/>
     <p:sldId id="266" r:id="rId16"/>
+    <p:sldId id="274" r:id="rId30"/>
+    <p:sldId id="273" r:id="rId29"/>
+    <p:sldId id="272" r:id="rId28"/>
     <p:sldId id="267" r:id="rId17"/>
     <p:sldId id="268" r:id="rId18"/>
     <p:sldId id="269" r:id="rId19"/>
@@ -8437,7 +8440,7 @@
                 <a:cs typeface="Google Sans Flex Medium"/>
                 <a:sym typeface="Google Sans Flex Medium"/>
               </a:rPr>
-              <a:t>Snapshots of the prototype</a:t>
+              <a:t>Snapshots of the prototype: practice</a:t>
             </a:r>
             <a:endParaRPr sz="1600">
               <a:latin typeface="Google Sans Flex Medium"/>
@@ -8450,7 +8453,7 @@
       </p:sp>
       <p:pic>
         <p:nvPicPr>
-          <p:cNvPr id="136" name="Picture 135" descr="compliance-guard.png"/>
+          <p:cNvPr id="136" name="Picture 135" descr="practice_start.jpg"/>
           <p:cNvPicPr>
             <a:picLocks noChangeAspect="1"/>
           </p:cNvPicPr>
@@ -8464,8 +8467,8 @@
         </p:blipFill>
         <p:spPr>
           <a:xfrm>
-            <a:off x="974343" y="1207007"/>
-            <a:ext cx="2861056" cy="1609344"/>
+            <a:off x="320040" y="1207008"/>
+            <a:ext cx="4169663" cy="2606039"/>
           </a:xfrm>
           <a:prstGeom prst="rect">
             <a:avLst/>
@@ -8485,8 +8488,8 @@
         </p:nvSpPr>
         <p:spPr>
           <a:xfrm>
-            <a:off x="320040" y="2843784"/>
-            <a:ext cx="4169663" cy="201168"/>
+            <a:off x="320040" y="3922776"/>
+            <a:ext cx="4169663" cy="822960"/>
           </a:xfrm>
           <a:prstGeom prst="rect">
             <a:avLst/>
@@ -8505,20 +8508,20 @@
               </a:spcAft>
             </a:pPr>
             <a:r>
-              <a:rPr sz="900" i="1">
-                <a:solidFill>
-                  <a:srgbClr val="5F6368"/>
+              <a:rPr sz="1000" i="0">
+                <a:solidFill>
+                  <a:srgbClr val="202124"/>
                 </a:solidFill>
                 <a:latin typeface="Google Sans Flex"/>
               </a:rPr>
-              <a:t>Practice: the Compliance Guard holds a risky promise (CC-01)</a:t>
+              <a:t>Mr. Tan as a 3D customer: he blinks, breathes, keeps eye contact and lip-syncs. His mood follows the trust and patience meters.</a:t>
             </a:r>
           </a:p>
         </p:txBody>
       </p:sp>
       <p:pic>
         <p:nvPicPr>
-          <p:cNvPr id="138" name="Picture 137" descr="report.png"/>
+          <p:cNvPr id="138" name="Picture 137" descr="practice_guard.jpg"/>
           <p:cNvPicPr>
             <a:picLocks noChangeAspect="1"/>
           </p:cNvPicPr>
@@ -8532,8 +8535,8 @@
         </p:blipFill>
         <p:spPr>
           <a:xfrm>
-            <a:off x="5308599" y="1207007"/>
-            <a:ext cx="2861056" cy="1609344"/>
+            <a:off x="4654295" y="1207008"/>
+            <a:ext cx="4169663" cy="2606039"/>
           </a:xfrm>
           <a:prstGeom prst="rect">
             <a:avLst/>
@@ -8553,8 +8556,8 @@
         </p:nvSpPr>
         <p:spPr>
           <a:xfrm>
-            <a:off x="4654295" y="2843784"/>
-            <a:ext cx="4169663" cy="201168"/>
+            <a:off x="4654295" y="3922776"/>
+            <a:ext cx="4169663" cy="822960"/>
           </a:xfrm>
           <a:prstGeom prst="rect">
             <a:avLst/>
@@ -8573,149 +8576,13 @@
               </a:spcAft>
             </a:pPr>
             <a:r>
-              <a:rPr sz="900" i="1">
-                <a:solidFill>
-                  <a:srgbClr val="5F6368"/>
+              <a:rPr sz="1000" i="0">
+                <a:solidFill>
+                  <a:srgbClr val="202124"/>
                 </a:solidFill>
                 <a:latin typeface="Google Sans Flex"/>
               </a:rPr>
-              <a:t>Report: compliance gate failed; every score quotes a turn</a:t>
-            </a:r>
-          </a:p>
-        </p:txBody>
-      </p:sp>
-      <p:pic>
-        <p:nvPicPr>
-          <p:cNvPr id="140" name="Picture 139" descr="persona_detail.png"/>
-          <p:cNvPicPr>
-            <a:picLocks noChangeAspect="1"/>
-          </p:cNvPicPr>
-          <p:nvPr/>
-        </p:nvPicPr>
-        <p:blipFill>
-          <a:blip r:embed="rId7"/>
-          <a:stretch>
-            <a:fillRect/>
-          </a:stretch>
-        </p:blipFill>
-        <p:spPr>
-          <a:xfrm>
-            <a:off x="974343" y="3127248"/>
-            <a:ext cx="2861056" cy="1609344"/>
-          </a:xfrm>
-          <a:prstGeom prst="rect">
-            <a:avLst/>
-          </a:prstGeom>
-          <a:ln w="9525">
-            <a:solidFill>
-              <a:srgbClr val="DADCE0"/>
-            </a:solidFill>
-          </a:ln>
-        </p:spPr>
-      </p:pic>
-      <p:sp>
-        <p:nvSpPr>
-          <p:cNvPr id="141" name="TextBox 140"/>
-          <p:cNvSpPr txBox="1"/>
-          <p:nvPr/>
-        </p:nvSpPr>
-        <p:spPr>
-          <a:xfrm>
-            <a:off x="320040" y="4764024"/>
-            <a:ext cx="4169663" cy="201168"/>
-          </a:xfrm>
-          <a:prstGeom prst="rect">
-            <a:avLst/>
-          </a:prstGeom>
-          <a:noFill/>
-        </p:spPr>
-        <p:txBody>
-          <a:bodyPr wrap="square" anchor="t" lIns="0" rIns="0" tIns="0" bIns="0">
-            <a:spAutoFit/>
-          </a:bodyPr>
-          <a:lstStyle/>
-          <a:p>
-            <a:pPr algn="l">
-              <a:spcAft>
-                <a:spcPts val="300"/>
-              </a:spcAft>
-            </a:pPr>
-            <a:r>
-              <a:rPr sz="900" i="1">
-                <a:solidFill>
-                  <a:srgbClr val="5F6368"/>
-                </a:solidFill>
-                <a:latin typeface="Google Sans Flex"/>
-              </a:rPr>
-              <a:t>Generated persona: needs and objections cite the source</a:t>
-            </a:r>
-          </a:p>
-        </p:txBody>
-      </p:sp>
-      <p:pic>
-        <p:nvPicPr>
-          <p:cNvPr id="142" name="Picture 141" descr="dashboard.png"/>
-          <p:cNvPicPr>
-            <a:picLocks noChangeAspect="1"/>
-          </p:cNvPicPr>
-          <p:nvPr/>
-        </p:nvPicPr>
-        <p:blipFill>
-          <a:blip r:embed="rId8"/>
-          <a:stretch>
-            <a:fillRect/>
-          </a:stretch>
-        </p:blipFill>
-        <p:spPr>
-          <a:xfrm>
-            <a:off x="5308599" y="3127248"/>
-            <a:ext cx="2861056" cy="1609344"/>
-          </a:xfrm>
-          <a:prstGeom prst="rect">
-            <a:avLst/>
-          </a:prstGeom>
-          <a:ln w="9525">
-            <a:solidFill>
-              <a:srgbClr val="DADCE0"/>
-            </a:solidFill>
-          </a:ln>
-        </p:spPr>
-      </p:pic>
-      <p:sp>
-        <p:nvSpPr>
-          <p:cNvPr id="143" name="TextBox 142"/>
-          <p:cNvSpPr txBox="1"/>
-          <p:nvPr/>
-        </p:nvSpPr>
-        <p:spPr>
-          <a:xfrm>
-            <a:off x="4654295" y="4764024"/>
-            <a:ext cx="4169663" cy="201168"/>
-          </a:xfrm>
-          <a:prstGeom prst="rect">
-            <a:avLst/>
-          </a:prstGeom>
-          <a:noFill/>
-        </p:spPr>
-        <p:txBody>
-          <a:bodyPr wrap="square" anchor="t" lIns="0" rIns="0" tIns="0" bIns="0">
-            <a:spAutoFit/>
-          </a:bodyPr>
-          <a:lstStyle/>
-          <a:p>
-            <a:pPr algn="l">
-              <a:spcAft>
-                <a:spcPts val="300"/>
-              </a:spcAft>
-            </a:pPr>
-            <a:r>
-              <a:rPr sz="900" i="1">
-                <a:solidFill>
-                  <a:srgbClr val="5F6368"/>
-                </a:solidFill>
-                <a:latin typeface="Google Sans Flex"/>
-              </a:rPr>
-              <a:t>Manager readiness view (sample team data, labeled in the app)</a:t>
+              <a:t>"This plan guarantees you 8% a year" is held before it is sent: the Guard quotes the words, names rule CC-01, and offers Edit message or Send anyway.</a:t>
             </a:r>
           </a:p>
         </p:txBody>
@@ -13259,6 +13126,918 @@
 </p:sld>
 </file>
 
+<file path=ppt/slides/slide17.xml><?xml version="1.0" encoding="utf-8"?>
+<p:sld xmlns:a="http://schemas.openxmlformats.org/drawingml/2006/main" xmlns:p="http://schemas.openxmlformats.org/presentationml/2006/main" xmlns:r="http://schemas.openxmlformats.org/officeDocument/2006/relationships">
+  <p:cSld>
+    <p:spTree>
+      <p:nvGrpSpPr>
+        <p:cNvPr id="1" name=""/>
+        <p:cNvGrpSpPr/>
+        <p:nvPr/>
+      </p:nvGrpSpPr>
+      <p:grpSpPr/>
+      <p:pic>
+        <p:nvPicPr>
+          <p:cNvPr id="132" name="Google Shape;132;p23" title="Frame 144.png"/>
+          <p:cNvPicPr preferRelativeResize="0"/>
+          <p:nvPr/>
+        </p:nvPicPr>
+        <p:blipFill rotWithShape="1">
+          <a:blip r:embed="rId2">
+            <a:alphaModFix/>
+          </a:blip>
+          <a:srcRect b="98001" l="0" r="0" t="0"/>
+          <a:stretch/>
+        </p:blipFill>
+        <p:spPr>
+          <a:xfrm>
+            <a:off x="0" y="5093562"/>
+            <a:ext cx="9144000" cy="54275"/>
+          </a:xfrm>
+          <a:prstGeom prst="rect">
+            <a:avLst/>
+          </a:prstGeom>
+          <a:noFill/>
+          <a:ln>
+            <a:noFill/>
+          </a:ln>
+        </p:spPr>
+      </p:pic>
+      <p:pic>
+        <p:nvPicPr>
+          <p:cNvPr id="133" name="Google Shape;133;p23" title="Group 427319979.png"/>
+          <p:cNvPicPr preferRelativeResize="0"/>
+          <p:nvPr/>
+        </p:nvPicPr>
+        <p:blipFill>
+          <a:blip r:embed="rId3">
+            <a:alphaModFix/>
+          </a:blip>
+          <a:stretch>
+            <a:fillRect/>
+          </a:stretch>
+        </p:blipFill>
+        <p:spPr>
+          <a:xfrm>
+            <a:off x="0" y="1"/>
+            <a:ext cx="9144000" cy="507359"/>
+          </a:xfrm>
+          <a:prstGeom prst="rect">
+            <a:avLst/>
+          </a:prstGeom>
+          <a:noFill/>
+          <a:ln>
+            <a:noFill/>
+          </a:ln>
+        </p:spPr>
+      </p:pic>
+      <p:sp>
+        <p:nvSpPr>
+          <p:cNvPr id="134" name="Google Shape;134;p23"/>
+          <p:cNvSpPr/>
+          <p:nvPr/>
+        </p:nvSpPr>
+        <p:spPr>
+          <a:xfrm>
+            <a:off x="-29250" y="5071875"/>
+            <a:ext cx="9173400" cy="97800"/>
+          </a:xfrm>
+          <a:prstGeom prst="rect">
+            <a:avLst/>
+          </a:prstGeom>
+          <a:solidFill>
+            <a:schemeClr val="dk1"/>
+          </a:solidFill>
+          <a:ln>
+            <a:noFill/>
+          </a:ln>
+        </p:spPr>
+        <p:txBody>
+          <a:bodyPr anchorCtr="0" anchor="ctr" bIns="91425" lIns="91425" spcFirstLastPara="1" rIns="91425" wrap="square" tIns="91425">
+            <a:noAutofit/>
+          </a:bodyPr>
+          <a:lstStyle/>
+          <a:p>
+            <a:pPr indent="0" lvl="0" marL="0" rtl="0" algn="ctr">
+              <a:spcBef>
+                <a:spcPts val="0"/>
+              </a:spcBef>
+              <a:spcAft>
+                <a:spcPts val="0"/>
+              </a:spcAft>
+              <a:buNone/>
+            </a:pPr>
+            <a:r>
+              <a:t/>
+            </a:r>
+            <a:endParaRPr/>
+          </a:p>
+        </p:txBody>
+      </p:sp>
+      <p:sp>
+        <p:nvSpPr>
+          <p:cNvPr id="135" name="Google Shape;135;p23"/>
+          <p:cNvSpPr txBox="1"/>
+          <p:nvPr/>
+        </p:nvSpPr>
+        <p:spPr>
+          <a:xfrm>
+            <a:off x="265350" y="663825"/>
+            <a:ext cx="8943000" cy="457200"/>
+          </a:xfrm>
+          <a:prstGeom prst="rect">
+            <a:avLst/>
+          </a:prstGeom>
+          <a:noFill/>
+          <a:ln>
+            <a:noFill/>
+          </a:ln>
+        </p:spPr>
+        <p:txBody>
+          <a:bodyPr anchorCtr="0" anchor="t" bIns="91425" lIns="91425" spcFirstLastPara="1" rIns="91425" wrap="square" tIns="91425">
+            <a:noAutofit/>
+          </a:bodyPr>
+          <a:lstStyle/>
+          <a:p>
+            <a:pPr indent="0" lvl="0" marL="0" rtl="0" algn="l">
+              <a:spcBef>
+                <a:spcPts val="0"/>
+              </a:spcBef>
+              <a:spcAft>
+                <a:spcPts val="0"/>
+              </a:spcAft>
+              <a:buNone/>
+            </a:pPr>
+            <a:r>
+              <a:rPr lang="en-GB" sz="1600">
+                <a:latin typeface="Google Sans Flex Medium"/>
+                <a:ea typeface="Google Sans Flex Medium"/>
+                <a:cs typeface="Google Sans Flex Medium"/>
+                <a:sym typeface="Google Sans Flex Medium"/>
+              </a:rPr>
+              <a:t>Snapshots of the prototype: knowledge and team</a:t>
+            </a:r>
+            <a:endParaRPr sz="1600">
+              <a:latin typeface="Google Sans Flex Medium"/>
+              <a:ea typeface="Google Sans Flex Medium"/>
+              <a:cs typeface="Google Sans Flex Medium"/>
+              <a:sym typeface="Google Sans Flex Medium"/>
+            </a:endParaRPr>
+          </a:p>
+        </p:txBody>
+      </p:sp>
+      <p:pic>
+        <p:nvPicPr>
+          <p:cNvPr id="136" name="Picture 135" descr="persona_detail.jpg"/>
+          <p:cNvPicPr>
+            <a:picLocks noChangeAspect="1"/>
+          </p:cNvPicPr>
+          <p:nvPr/>
+        </p:nvPicPr>
+        <p:blipFill>
+          <a:blip r:embed="rId4"/>
+          <a:stretch>
+            <a:fillRect/>
+          </a:stretch>
+        </p:blipFill>
+        <p:spPr>
+          <a:xfrm>
+            <a:off x="320040" y="1207008"/>
+            <a:ext cx="4169663" cy="2606039"/>
+          </a:xfrm>
+          <a:prstGeom prst="rect">
+            <a:avLst/>
+          </a:prstGeom>
+          <a:ln w="9525">
+            <a:solidFill>
+              <a:srgbClr val="DADCE0"/>
+            </a:solidFill>
+          </a:ln>
+        </p:spPr>
+      </p:pic>
+      <p:sp>
+        <p:nvSpPr>
+          <p:cNvPr id="137" name="TextBox 136"/>
+          <p:cNvSpPr txBox="1"/>
+          <p:nvPr/>
+        </p:nvSpPr>
+        <p:spPr>
+          <a:xfrm>
+            <a:off x="320040" y="3922776"/>
+            <a:ext cx="4169663" cy="822960"/>
+          </a:xfrm>
+          <a:prstGeom prst="rect">
+            <a:avLst/>
+          </a:prstGeom>
+          <a:noFill/>
+        </p:spPr>
+        <p:txBody>
+          <a:bodyPr wrap="square" anchor="t" lIns="0" rIns="0" tIns="0" bIns="0">
+            <a:spAutoFit/>
+          </a:bodyPr>
+          <a:lstStyle/>
+          <a:p>
+            <a:pPr algn="l">
+              <a:spcAft>
+                <a:spcPts val="300"/>
+              </a:spcAft>
+            </a:pPr>
+            <a:r>
+              <a:rPr sz="1000" i="0">
+                <a:solidFill>
+                  <a:srgbClr val="202124"/>
+                </a:solidFill>
+                <a:latin typeface="Google Sans Flex"/>
+              </a:rPr>
+              <a:t>An approved persona: profile, hidden needs and objections, each grounded in cited source passages.</a:t>
+            </a:r>
+          </a:p>
+        </p:txBody>
+      </p:sp>
+      <p:pic>
+        <p:nvPicPr>
+          <p:cNvPr id="138" name="Picture 137" descr="dashboard.jpg"/>
+          <p:cNvPicPr>
+            <a:picLocks noChangeAspect="1"/>
+          </p:cNvPicPr>
+          <p:nvPr/>
+        </p:nvPicPr>
+        <p:blipFill>
+          <a:blip r:embed="rId5"/>
+          <a:stretch>
+            <a:fillRect/>
+          </a:stretch>
+        </p:blipFill>
+        <p:spPr>
+          <a:xfrm>
+            <a:off x="4654295" y="1207008"/>
+            <a:ext cx="4169663" cy="2606039"/>
+          </a:xfrm>
+          <a:prstGeom prst="rect">
+            <a:avLst/>
+          </a:prstGeom>
+          <a:ln w="9525">
+            <a:solidFill>
+              <a:srgbClr val="DADCE0"/>
+            </a:solidFill>
+          </a:ln>
+        </p:spPr>
+      </p:pic>
+      <p:sp>
+        <p:nvSpPr>
+          <p:cNvPr id="139" name="TextBox 138"/>
+          <p:cNvSpPr txBox="1"/>
+          <p:nvPr/>
+        </p:nvSpPr>
+        <p:spPr>
+          <a:xfrm>
+            <a:off x="4654295" y="3922776"/>
+            <a:ext cx="4169663" cy="822960"/>
+          </a:xfrm>
+          <a:prstGeom prst="rect">
+            <a:avLst/>
+          </a:prstGeom>
+          <a:noFill/>
+        </p:spPr>
+        <p:txBody>
+          <a:bodyPr wrap="square" anchor="t" lIns="0" rIns="0" tIns="0" bIns="0">
+            <a:spAutoFit/>
+          </a:bodyPr>
+          <a:lstStyle/>
+          <a:p>
+            <a:pPr algn="l">
+              <a:spcAft>
+                <a:spcPts val="300"/>
+              </a:spcAft>
+            </a:pPr>
+            <a:r>
+              <a:rPr sz="1000" i="0">
+                <a:solidFill>
+                  <a:srgbClr val="202124"/>
+                </a:solidFill>
+                <a:latin typeface="Google Sans Flex"/>
+              </a:rPr>
+              <a:t>Manager readiness view: who is ready to go live, weakest skills, top violations (sample team data, labeled in the app).</a:t>
+            </a:r>
+          </a:p>
+        </p:txBody>
+      </p:sp>
+    </p:spTree>
+  </p:cSld>
+  <p:clrMapOvr>
+    <a:masterClrMapping/>
+  </p:clrMapOvr>
+</p:sld>
+</file>
+
+<file path=ppt/slides/slide18.xml><?xml version="1.0" encoding="utf-8"?>
+<p:sld xmlns:a="http://schemas.openxmlformats.org/drawingml/2006/main" xmlns:p="http://schemas.openxmlformats.org/presentationml/2006/main" xmlns:r="http://schemas.openxmlformats.org/officeDocument/2006/relationships">
+  <p:cSld>
+    <p:spTree>
+      <p:nvGrpSpPr>
+        <p:cNvPr id="1" name=""/>
+        <p:cNvGrpSpPr/>
+        <p:nvPr/>
+      </p:nvGrpSpPr>
+      <p:grpSpPr/>
+      <p:pic>
+        <p:nvPicPr>
+          <p:cNvPr id="132" name="Google Shape;132;p23" title="Frame 144.png"/>
+          <p:cNvPicPr preferRelativeResize="0"/>
+          <p:nvPr/>
+        </p:nvPicPr>
+        <p:blipFill rotWithShape="1">
+          <a:blip r:embed="rId2">
+            <a:alphaModFix/>
+          </a:blip>
+          <a:srcRect b="98001" l="0" r="0" t="0"/>
+          <a:stretch/>
+        </p:blipFill>
+        <p:spPr>
+          <a:xfrm>
+            <a:off x="0" y="5093562"/>
+            <a:ext cx="9144000" cy="54275"/>
+          </a:xfrm>
+          <a:prstGeom prst="rect">
+            <a:avLst/>
+          </a:prstGeom>
+          <a:noFill/>
+          <a:ln>
+            <a:noFill/>
+          </a:ln>
+        </p:spPr>
+      </p:pic>
+      <p:pic>
+        <p:nvPicPr>
+          <p:cNvPr id="133" name="Google Shape;133;p23" title="Group 427319979.png"/>
+          <p:cNvPicPr preferRelativeResize="0"/>
+          <p:nvPr/>
+        </p:nvPicPr>
+        <p:blipFill>
+          <a:blip r:embed="rId3">
+            <a:alphaModFix/>
+          </a:blip>
+          <a:stretch>
+            <a:fillRect/>
+          </a:stretch>
+        </p:blipFill>
+        <p:spPr>
+          <a:xfrm>
+            <a:off x="0" y="1"/>
+            <a:ext cx="9144000" cy="507359"/>
+          </a:xfrm>
+          <a:prstGeom prst="rect">
+            <a:avLst/>
+          </a:prstGeom>
+          <a:noFill/>
+          <a:ln>
+            <a:noFill/>
+          </a:ln>
+        </p:spPr>
+      </p:pic>
+      <p:sp>
+        <p:nvSpPr>
+          <p:cNvPr id="134" name="Google Shape;134;p23"/>
+          <p:cNvSpPr/>
+          <p:nvPr/>
+        </p:nvSpPr>
+        <p:spPr>
+          <a:xfrm>
+            <a:off x="-29250" y="5071875"/>
+            <a:ext cx="9173400" cy="97800"/>
+          </a:xfrm>
+          <a:prstGeom prst="rect">
+            <a:avLst/>
+          </a:prstGeom>
+          <a:solidFill>
+            <a:schemeClr val="dk1"/>
+          </a:solidFill>
+          <a:ln>
+            <a:noFill/>
+          </a:ln>
+        </p:spPr>
+        <p:txBody>
+          <a:bodyPr anchorCtr="0" anchor="ctr" bIns="91425" lIns="91425" spcFirstLastPara="1" rIns="91425" wrap="square" tIns="91425">
+            <a:noAutofit/>
+          </a:bodyPr>
+          <a:lstStyle/>
+          <a:p>
+            <a:pPr indent="0" lvl="0" marL="0" rtl="0" algn="ctr">
+              <a:spcBef>
+                <a:spcPts val="0"/>
+              </a:spcBef>
+              <a:spcAft>
+                <a:spcPts val="0"/>
+              </a:spcAft>
+              <a:buNone/>
+            </a:pPr>
+            <a:r>
+              <a:t/>
+            </a:r>
+            <a:endParaRPr/>
+          </a:p>
+        </p:txBody>
+      </p:sp>
+      <p:sp>
+        <p:nvSpPr>
+          <p:cNvPr id="135" name="Google Shape;135;p23"/>
+          <p:cNvSpPr txBox="1"/>
+          <p:nvPr/>
+        </p:nvSpPr>
+        <p:spPr>
+          <a:xfrm>
+            <a:off x="265350" y="663825"/>
+            <a:ext cx="8943000" cy="457200"/>
+          </a:xfrm>
+          <a:prstGeom prst="rect">
+            <a:avLst/>
+          </a:prstGeom>
+          <a:noFill/>
+          <a:ln>
+            <a:noFill/>
+          </a:ln>
+        </p:spPr>
+        <p:txBody>
+          <a:bodyPr anchorCtr="0" anchor="t" bIns="91425" lIns="91425" spcFirstLastPara="1" rIns="91425" wrap="square" tIns="91425">
+            <a:noAutofit/>
+          </a:bodyPr>
+          <a:lstStyle/>
+          <a:p>
+            <a:pPr indent="0" lvl="0" marL="0" rtl="0" algn="l">
+              <a:spcBef>
+                <a:spcPts val="0"/>
+              </a:spcBef>
+              <a:spcAft>
+                <a:spcPts val="0"/>
+              </a:spcAft>
+              <a:buNone/>
+            </a:pPr>
+            <a:r>
+              <a:rPr lang="en-GB" sz="1600">
+                <a:latin typeface="Google Sans Flex Medium"/>
+                <a:ea typeface="Google Sans Flex Medium"/>
+                <a:cs typeface="Google Sans Flex Medium"/>
+                <a:sym typeface="Google Sans Flex Medium"/>
+              </a:rPr>
+              <a:t>Snapshots of the prototype: evidence</a:t>
+            </a:r>
+            <a:endParaRPr sz="1600">
+              <a:latin typeface="Google Sans Flex Medium"/>
+              <a:ea typeface="Google Sans Flex Medium"/>
+              <a:cs typeface="Google Sans Flex Medium"/>
+              <a:sym typeface="Google Sans Flex Medium"/>
+            </a:endParaRPr>
+          </a:p>
+        </p:txBody>
+      </p:sp>
+      <p:pic>
+        <p:nvPicPr>
+          <p:cNvPr id="136" name="Picture 135" descr="report_evidence.jpg"/>
+          <p:cNvPicPr>
+            <a:picLocks noChangeAspect="1"/>
+          </p:cNvPicPr>
+          <p:nvPr/>
+        </p:nvPicPr>
+        <p:blipFill>
+          <a:blip r:embed="rId4"/>
+          <a:stretch>
+            <a:fillRect/>
+          </a:stretch>
+        </p:blipFill>
+        <p:spPr>
+          <a:xfrm>
+            <a:off x="320040" y="1207008"/>
+            <a:ext cx="4169663" cy="2606039"/>
+          </a:xfrm>
+          <a:prstGeom prst="rect">
+            <a:avLst/>
+          </a:prstGeom>
+          <a:ln w="9525">
+            <a:solidFill>
+              <a:srgbClr val="DADCE0"/>
+            </a:solidFill>
+          </a:ln>
+        </p:spPr>
+      </p:pic>
+      <p:sp>
+        <p:nvSpPr>
+          <p:cNvPr id="137" name="TextBox 136"/>
+          <p:cNvSpPr txBox="1"/>
+          <p:nvPr/>
+        </p:nvSpPr>
+        <p:spPr>
+          <a:xfrm>
+            <a:off x="320040" y="3922776"/>
+            <a:ext cx="4169663" cy="822960"/>
+          </a:xfrm>
+          <a:prstGeom prst="rect">
+            <a:avLst/>
+          </a:prstGeom>
+          <a:noFill/>
+        </p:spPr>
+        <p:txBody>
+          <a:bodyPr wrap="square" anchor="t" lIns="0" rIns="0" tIns="0" bIns="0">
+            <a:spAutoFit/>
+          </a:bodyPr>
+          <a:lstStyle/>
+          <a:p>
+            <a:pPr algn="l">
+              <a:spcAft>
+                <a:spcPts val="300"/>
+              </a:spcAft>
+            </a:pPr>
+            <a:r>
+              <a:rPr sz="1000" i="0">
+                <a:solidFill>
+                  <a:srgbClr val="202124"/>
+                </a:solidFill>
+                <a:latin typeface="Google Sans Flex"/>
+              </a:rPr>
+              <a:t>Skills, with evidence: each score quotes the trainee's own words; select a quote to jump to that turn in the transcript.</a:t>
+            </a:r>
+          </a:p>
+        </p:txBody>
+      </p:sp>
+      <p:pic>
+        <p:nvPicPr>
+          <p:cNvPr id="138" name="Picture 137" descr="report_violations.jpg"/>
+          <p:cNvPicPr>
+            <a:picLocks noChangeAspect="1"/>
+          </p:cNvPicPr>
+          <p:nvPr/>
+        </p:nvPicPr>
+        <p:blipFill>
+          <a:blip r:embed="rId5"/>
+          <a:stretch>
+            <a:fillRect/>
+          </a:stretch>
+        </p:blipFill>
+        <p:spPr>
+          <a:xfrm>
+            <a:off x="4654295" y="1207008"/>
+            <a:ext cx="4169663" cy="2606039"/>
+          </a:xfrm>
+          <a:prstGeom prst="rect">
+            <a:avLst/>
+          </a:prstGeom>
+          <a:ln w="9525">
+            <a:solidFill>
+              <a:srgbClr val="DADCE0"/>
+            </a:solidFill>
+          </a:ln>
+        </p:spPr>
+      </p:pic>
+      <p:sp>
+        <p:nvSpPr>
+          <p:cNvPr id="139" name="TextBox 138"/>
+          <p:cNvSpPr txBox="1"/>
+          <p:nvPr/>
+        </p:nvSpPr>
+        <p:spPr>
+          <a:xfrm>
+            <a:off x="4654295" y="3922776"/>
+            <a:ext cx="4169663" cy="822960"/>
+          </a:xfrm>
+          <a:prstGeom prst="rect">
+            <a:avLst/>
+          </a:prstGeom>
+          <a:noFill/>
+        </p:spPr>
+        <p:txBody>
+          <a:bodyPr wrap="square" anchor="t" lIns="0" rIns="0" tIns="0" bIns="0">
+            <a:spAutoFit/>
+          </a:bodyPr>
+          <a:lstStyle/>
+          <a:p>
+            <a:pPr algn="l">
+              <a:spcAft>
+                <a:spcPts val="300"/>
+              </a:spcAft>
+            </a:pPr>
+            <a:r>
+              <a:rPr sz="1000" i="0">
+                <a:solidFill>
+                  <a:srgbClr val="202124"/>
+                </a:solidFill>
+                <a:latin typeface="Google Sans Flex"/>
+              </a:rPr>
+              <a:t>Compliance violations name the rule and the exact phrase; strengths and next steps turn the grade into a coaching plan.</a:t>
+            </a:r>
+          </a:p>
+        </p:txBody>
+      </p:sp>
+    </p:spTree>
+  </p:cSld>
+  <p:clrMapOvr>
+    <a:masterClrMapping/>
+  </p:clrMapOvr>
+</p:sld>
+</file>
+
+<file path=ppt/slides/slide19.xml><?xml version="1.0" encoding="utf-8"?>
+<p:sld xmlns:a="http://schemas.openxmlformats.org/drawingml/2006/main" xmlns:p="http://schemas.openxmlformats.org/presentationml/2006/main" xmlns:r="http://schemas.openxmlformats.org/officeDocument/2006/relationships">
+  <p:cSld>
+    <p:spTree>
+      <p:nvGrpSpPr>
+        <p:cNvPr id="1" name=""/>
+        <p:cNvGrpSpPr/>
+        <p:nvPr/>
+      </p:nvGrpSpPr>
+      <p:grpSpPr/>
+      <p:pic>
+        <p:nvPicPr>
+          <p:cNvPr id="132" name="Google Shape;132;p23" title="Frame 144.png"/>
+          <p:cNvPicPr preferRelativeResize="0"/>
+          <p:nvPr/>
+        </p:nvPicPr>
+        <p:blipFill rotWithShape="1">
+          <a:blip r:embed="rId2">
+            <a:alphaModFix/>
+          </a:blip>
+          <a:srcRect b="98001" l="0" r="0" t="0"/>
+          <a:stretch/>
+        </p:blipFill>
+        <p:spPr>
+          <a:xfrm>
+            <a:off x="0" y="5093562"/>
+            <a:ext cx="9144000" cy="54275"/>
+          </a:xfrm>
+          <a:prstGeom prst="rect">
+            <a:avLst/>
+          </a:prstGeom>
+          <a:noFill/>
+          <a:ln>
+            <a:noFill/>
+          </a:ln>
+        </p:spPr>
+      </p:pic>
+      <p:pic>
+        <p:nvPicPr>
+          <p:cNvPr id="133" name="Google Shape;133;p23" title="Group 427319979.png"/>
+          <p:cNvPicPr preferRelativeResize="0"/>
+          <p:nvPr/>
+        </p:nvPicPr>
+        <p:blipFill>
+          <a:blip r:embed="rId3">
+            <a:alphaModFix/>
+          </a:blip>
+          <a:stretch>
+            <a:fillRect/>
+          </a:stretch>
+        </p:blipFill>
+        <p:spPr>
+          <a:xfrm>
+            <a:off x="0" y="1"/>
+            <a:ext cx="9144000" cy="507359"/>
+          </a:xfrm>
+          <a:prstGeom prst="rect">
+            <a:avLst/>
+          </a:prstGeom>
+          <a:noFill/>
+          <a:ln>
+            <a:noFill/>
+          </a:ln>
+        </p:spPr>
+      </p:pic>
+      <p:sp>
+        <p:nvSpPr>
+          <p:cNvPr id="134" name="Google Shape;134;p23"/>
+          <p:cNvSpPr/>
+          <p:nvPr/>
+        </p:nvSpPr>
+        <p:spPr>
+          <a:xfrm>
+            <a:off x="-29250" y="5071875"/>
+            <a:ext cx="9173400" cy="97800"/>
+          </a:xfrm>
+          <a:prstGeom prst="rect">
+            <a:avLst/>
+          </a:prstGeom>
+          <a:solidFill>
+            <a:schemeClr val="dk1"/>
+          </a:solidFill>
+          <a:ln>
+            <a:noFill/>
+          </a:ln>
+        </p:spPr>
+        <p:txBody>
+          <a:bodyPr anchorCtr="0" anchor="ctr" bIns="91425" lIns="91425" spcFirstLastPara="1" rIns="91425" wrap="square" tIns="91425">
+            <a:noAutofit/>
+          </a:bodyPr>
+          <a:lstStyle/>
+          <a:p>
+            <a:pPr indent="0" lvl="0" marL="0" rtl="0" algn="ctr">
+              <a:spcBef>
+                <a:spcPts val="0"/>
+              </a:spcBef>
+              <a:spcAft>
+                <a:spcPts val="0"/>
+              </a:spcAft>
+              <a:buNone/>
+            </a:pPr>
+            <a:r>
+              <a:t/>
+            </a:r>
+            <a:endParaRPr/>
+          </a:p>
+        </p:txBody>
+      </p:sp>
+      <p:sp>
+        <p:nvSpPr>
+          <p:cNvPr id="135" name="Google Shape;135;p23"/>
+          <p:cNvSpPr txBox="1"/>
+          <p:nvPr/>
+        </p:nvSpPr>
+        <p:spPr>
+          <a:xfrm>
+            <a:off x="265350" y="663825"/>
+            <a:ext cx="8943000" cy="457200"/>
+          </a:xfrm>
+          <a:prstGeom prst="rect">
+            <a:avLst/>
+          </a:prstGeom>
+          <a:noFill/>
+          <a:ln>
+            <a:noFill/>
+          </a:ln>
+        </p:spPr>
+        <p:txBody>
+          <a:bodyPr anchorCtr="0" anchor="t" bIns="91425" lIns="91425" spcFirstLastPara="1" rIns="91425" wrap="square" tIns="91425">
+            <a:noAutofit/>
+          </a:bodyPr>
+          <a:lstStyle/>
+          <a:p>
+            <a:pPr indent="0" lvl="0" marL="0" rtl="0" algn="l">
+              <a:spcBef>
+                <a:spcPts val="0"/>
+              </a:spcBef>
+              <a:spcAft>
+                <a:spcPts val="0"/>
+              </a:spcAft>
+              <a:buNone/>
+            </a:pPr>
+            <a:r>
+              <a:rPr lang="en-GB" sz="1600">
+                <a:latin typeface="Google Sans Flex Medium"/>
+                <a:ea typeface="Google Sans Flex Medium"/>
+                <a:cs typeface="Google Sans Flex Medium"/>
+                <a:sym typeface="Google Sans Flex Medium"/>
+              </a:rPr>
+              <a:t>Snapshots of the prototype: coaching and the report</a:t>
+            </a:r>
+            <a:endParaRPr sz="1600">
+              <a:latin typeface="Google Sans Flex Medium"/>
+              <a:ea typeface="Google Sans Flex Medium"/>
+              <a:cs typeface="Google Sans Flex Medium"/>
+              <a:sym typeface="Google Sans Flex Medium"/>
+            </a:endParaRPr>
+          </a:p>
+        </p:txBody>
+      </p:sp>
+      <p:pic>
+        <p:nvPicPr>
+          <p:cNvPr id="136" name="Picture 135" descr="practice_session.jpg"/>
+          <p:cNvPicPr>
+            <a:picLocks noChangeAspect="1"/>
+          </p:cNvPicPr>
+          <p:nvPr/>
+        </p:nvPicPr>
+        <p:blipFill>
+          <a:blip r:embed="rId4"/>
+          <a:stretch>
+            <a:fillRect/>
+          </a:stretch>
+        </p:blipFill>
+        <p:spPr>
+          <a:xfrm>
+            <a:off x="320040" y="1207008"/>
+            <a:ext cx="4169663" cy="2606039"/>
+          </a:xfrm>
+          <a:prstGeom prst="rect">
+            <a:avLst/>
+          </a:prstGeom>
+          <a:ln w="9525">
+            <a:solidFill>
+              <a:srgbClr val="DADCE0"/>
+            </a:solidFill>
+          </a:ln>
+        </p:spPr>
+      </p:pic>
+      <p:sp>
+        <p:nvSpPr>
+          <p:cNvPr id="137" name="TextBox 136"/>
+          <p:cNvSpPr txBox="1"/>
+          <p:nvPr/>
+        </p:nvSpPr>
+        <p:spPr>
+          <a:xfrm>
+            <a:off x="320040" y="3922776"/>
+            <a:ext cx="4169663" cy="822960"/>
+          </a:xfrm>
+          <a:prstGeom prst="rect">
+            <a:avLst/>
+          </a:prstGeom>
+          <a:noFill/>
+        </p:spPr>
+        <p:txBody>
+          <a:bodyPr wrap="square" anchor="t" lIns="0" rIns="0" tIns="0" bIns="0">
+            <a:spAutoFit/>
+          </a:bodyPr>
+          <a:lstStyle/>
+          <a:p>
+            <a:pPr algn="l">
+              <a:spcAft>
+                <a:spcPts val="300"/>
+              </a:spcAft>
+            </a:pPr>
+            <a:r>
+              <a:rPr sz="1000" i="0">
+                <a:solidFill>
+                  <a:srgbClr val="202124"/>
+                </a:solidFill>
+                <a:latin typeface="Google Sans Flex"/>
+              </a:rPr>
+              <a:t>Later in the session: trust has dropped, the coach suggests the next move, and every customer reply cites the knowledge base.</a:t>
+            </a:r>
+          </a:p>
+        </p:txBody>
+      </p:sp>
+      <p:pic>
+        <p:nvPicPr>
+          <p:cNvPr id="138" name="Picture 137" descr="report.jpg"/>
+          <p:cNvPicPr>
+            <a:picLocks noChangeAspect="1"/>
+          </p:cNvPicPr>
+          <p:nvPr/>
+        </p:nvPicPr>
+        <p:blipFill>
+          <a:blip r:embed="rId5"/>
+          <a:stretch>
+            <a:fillRect/>
+          </a:stretch>
+        </p:blipFill>
+        <p:spPr>
+          <a:xfrm>
+            <a:off x="4654295" y="1207008"/>
+            <a:ext cx="4169663" cy="2606039"/>
+          </a:xfrm>
+          <a:prstGeom prst="rect">
+            <a:avLst/>
+          </a:prstGeom>
+          <a:ln w="9525">
+            <a:solidFill>
+              <a:srgbClr val="DADCE0"/>
+            </a:solidFill>
+          </a:ln>
+        </p:spPr>
+      </p:pic>
+      <p:sp>
+        <p:nvSpPr>
+          <p:cNvPr id="139" name="TextBox 138"/>
+          <p:cNvSpPr txBox="1"/>
+          <p:nvPr/>
+        </p:nvSpPr>
+        <p:spPr>
+          <a:xfrm>
+            <a:off x="4654295" y="3922776"/>
+            <a:ext cx="4169663" cy="822960"/>
+          </a:xfrm>
+          <a:prstGeom prst="rect">
+            <a:avLst/>
+          </a:prstGeom>
+          <a:noFill/>
+        </p:spPr>
+        <p:txBody>
+          <a:bodyPr wrap="square" anchor="t" lIns="0" rIns="0" tIns="0" bIns="0">
+            <a:spAutoFit/>
+          </a:bodyPr>
+          <a:lstStyle/>
+          <a:p>
+            <a:pPr algn="l">
+              <a:spcAft>
+                <a:spcPts val="300"/>
+              </a:spcAft>
+            </a:pPr>
+            <a:r>
+              <a:rPr sz="1000" i="0">
+                <a:solidFill>
+                  <a:srgbClr val="202124"/>
+                </a:solidFill>
+                <a:latin typeface="Google Sans Flex"/>
+              </a:rPr>
+              <a:t>The report: one high-severity violation fails the compliance gate and caps the score (28 here), however good the rest was.</a:t>
+            </a:r>
+          </a:p>
+        </p:txBody>
+      </p:sp>
+    </p:spTree>
+  </p:cSld>
+  <p:clrMapOvr>
+    <a:masterClrMapping/>
+  </p:clrMapOvr>
+</p:sld>
+</file>
+
 <file path=ppt/slides/slide3.xml><?xml version="1.0" encoding="utf-8"?>
 <p:sld xmlns:a="http://schemas.openxmlformats.org/drawingml/2006/main" xmlns:r="http://schemas.openxmlformats.org/officeDocument/2006/relationships" xmlns:mc="http://schemas.openxmlformats.org/markup-compatibility/2006" xmlns:mv="urn:schemas-microsoft-com:mac:vml" xmlns:p="http://schemas.openxmlformats.org/presentationml/2006/main" xmlns:c="http://schemas.openxmlformats.org/drawingml/2006/chart" xmlns:dgm="http://schemas.openxmlformats.org/drawingml/2006/diagram" xmlns:o="urn:schemas-microsoft-com:office:office" xmlns:v="urn:schemas-microsoft-com:vml" xmlns:pvml="urn:schemas-microsoft-com:office:powerpoint" xmlns:com="http://schemas.openxmlformats.org/drawingml/2006/compatibility" xmlns:p14="http://schemas.microsoft.com/office/powerpoint/2010/main" xmlns:p15="http://schemas.microsoft.com/office/powerpoint/2012/main" xmlns:ahyp="http://schemas.microsoft.com/office/drawing/2018/hyperlinkcolor">
   <p:cSld>
@@ -13901,14 +14680,14 @@
                 </a:solidFill>
                 <a:latin typeface="Google Sans Flex SemiBold"/>
               </a:rPr>
-              <a:t>Live app: the Compliance Guard holds a risky message</a:t>
+              <a:t>Live app: a 3D customer, and the Guard holds a risky message</a:t>
             </a:r>
           </a:p>
         </p:txBody>
       </p:sp>
       <p:pic>
         <p:nvPicPr>
-          <p:cNvPr id="83" name="Picture 82" descr="crop_guard_full.png"/>
+          <p:cNvPr id="83" name="Picture 82" descr="practice_guard.jpg"/>
           <p:cNvPicPr>
             <a:picLocks noChangeAspect="1"/>
           </p:cNvPicPr>
@@ -13922,8 +14701,8 @@
         </p:blipFill>
         <p:spPr>
           <a:xfrm>
-            <a:off x="5394960" y="1679705"/>
-            <a:ext cx="3291840" cy="2026405"/>
+            <a:off x="5394960" y="1664208"/>
+            <a:ext cx="3291840" cy="2057400"/>
           </a:xfrm>
           <a:prstGeom prst="rect">
             <a:avLst/>
@@ -13969,7 +14748,7 @@
                 </a:solidFill>
                 <a:latin typeface="Google Sans Flex"/>
               </a:rPr>
-              <a:t>The trainee types a guaranteed-return promise. The Guard quotes the phrase, names rule CC-01 and offers Edit message or Send anyway.</a:t>
+              <a:t>Mr. Tan, a cautious retiree, is rendered as a 3D customer. The trainee types a guaranteed-return promise; the Guard quotes the phrase, names rule CC-01 and offers Edit message or Send anyway.</a:t>
             </a:r>
           </a:p>
         </p:txBody>
@@ -16792,7 +17571,7 @@
       </p:sp>
       <p:pic>
         <p:nvPicPr>
-          <p:cNvPr id="99" name="Picture 98" descr="crop_persona_cite.png"/>
+          <p:cNvPr id="99" name="Picture 98" descr="persona_detail.jpg"/>
           <p:cNvPicPr>
             <a:picLocks noChangeAspect="1"/>
           </p:cNvPicPr>
@@ -16806,8 +17585,8 @@
         </p:blipFill>
         <p:spPr>
           <a:xfrm>
-            <a:off x="421450" y="1645920"/>
-            <a:ext cx="2375786" cy="1463040"/>
+            <a:off x="438911" y="1645919"/>
+            <a:ext cx="2340864" cy="1463040"/>
           </a:xfrm>
           <a:prstGeom prst="rect">
             <a:avLst/>
@@ -17078,7 +17857,7 @@
       </p:sp>
       <p:pic>
         <p:nvPicPr>
-          <p:cNvPr id="105" name="Picture 104" descr="crop_guard.png"/>
+          <p:cNvPr id="105" name="Picture 104" descr="practice_guard.jpg"/>
           <p:cNvPicPr>
             <a:picLocks noChangeAspect="1"/>
           </p:cNvPicPr>
@@ -17092,8 +17871,8 @@
         </p:blipFill>
         <p:spPr>
           <a:xfrm>
-            <a:off x="3383834" y="1645920"/>
-            <a:ext cx="2376331" cy="1463040"/>
+            <a:off x="3401568" y="1645919"/>
+            <a:ext cx="2340864" cy="1463040"/>
           </a:xfrm>
           <a:prstGeom prst="rect">
             <a:avLst/>
@@ -17364,7 +18143,7 @@
       </p:sp>
       <p:pic>
         <p:nvPicPr>
-          <p:cNvPr id="111" name="Picture 110" descr="crop_dashboard_top.png"/>
+          <p:cNvPr id="111" name="Picture 110" descr="report.jpg"/>
           <p:cNvPicPr>
             <a:picLocks noChangeAspect="1"/>
           </p:cNvPicPr>
@@ -17378,8 +18157,8 @@
         </p:blipFill>
         <p:spPr>
           <a:xfrm>
-            <a:off x="6346652" y="1645920"/>
-            <a:ext cx="2376007" cy="1463040"/>
+            <a:off x="6364223" y="1645919"/>
+            <a:ext cx="2340864" cy="1463040"/>
           </a:xfrm>
           <a:prstGeom prst="rect">
             <a:avLst/>
@@ -17499,7 +18278,7 @@
                 </a:solidFill>
                 <a:latin typeface="Google Sans Flex"/>
               </a:rPr>
-              <a:t>Screens from the deployed app: persona draft with citation chips, Compliance Guard card, manager readiness view (sample team data, labeled in the app).</a:t>
+              <a:t>Screens from the deployed app: a persona grounded in cited sources, the 3D customer with the Compliance Guard card, and the evidence-verified report.</a:t>
             </a:r>
           </a:p>
         </p:txBody>
@@ -17681,7 +18460,7 @@
       </p:sp>
       <p:pic>
         <p:nvPicPr>
-          <p:cNvPr id="104" name="Picture 103" descr="home.png"/>
+          <p:cNvPr id="104" name="Picture 103" descr="home.jpg"/>
           <p:cNvPicPr>
             <a:picLocks noChangeAspect="1"/>
           </p:cNvPicPr>
@@ -17695,8 +18474,8 @@
         </p:blipFill>
         <p:spPr>
           <a:xfrm>
-            <a:off x="974343" y="1207007"/>
-            <a:ext cx="2861056" cy="1609344"/>
+            <a:off x="1117396" y="1207008"/>
+            <a:ext cx="2574950" cy="1609344"/>
           </a:xfrm>
           <a:prstGeom prst="rect">
             <a:avLst/>
@@ -17742,14 +18521,14 @@
                 </a:solidFill>
                 <a:latin typeface="Google Sans Flex"/>
               </a:rPr>
-              <a:t>Home: pick a scenario and start practicing</a:t>
+              <a:t>Home: what SkillCoach does, start the 3-minute demo</a:t>
             </a:r>
           </a:p>
         </p:txBody>
       </p:sp>
       <p:pic>
         <p:nvPicPr>
-          <p:cNvPr id="106" name="Picture 105" descr="knowledge.png"/>
+          <p:cNvPr id="106" name="Picture 105" descr="knowledge.jpg"/>
           <p:cNvPicPr>
             <a:picLocks noChangeAspect="1"/>
           </p:cNvPicPr>
@@ -17763,8 +18542,8 @@
         </p:blipFill>
         <p:spPr>
           <a:xfrm>
-            <a:off x="5308599" y="1207007"/>
-            <a:ext cx="2861056" cy="1609344"/>
+            <a:off x="5451652" y="1207008"/>
+            <a:ext cx="2574950" cy="1609344"/>
           </a:xfrm>
           <a:prstGeom prst="rect">
             <a:avLst/>
@@ -17810,14 +18589,14 @@
                 </a:solidFill>
                 <a:latin typeface="Google Sans Flex"/>
               </a:rPr>
-              <a:t>Knowledge base: upload manuals and policies</a:t>
+              <a:t>Knowledge base: upload manuals and policies, test a search</a:t>
             </a:r>
           </a:p>
         </p:txBody>
       </p:sp>
       <p:pic>
         <p:nvPicPr>
-          <p:cNvPr id="108" name="Picture 107" descr="personas.png"/>
+          <p:cNvPr id="108" name="Picture 107" descr="persona_new.jpg"/>
           <p:cNvPicPr>
             <a:picLocks noChangeAspect="1"/>
           </p:cNvPicPr>
@@ -17831,8 +18610,8 @@
         </p:blipFill>
         <p:spPr>
           <a:xfrm>
-            <a:off x="974343" y="3127248"/>
-            <a:ext cx="2861056" cy="1609344"/>
+            <a:off x="1117396" y="3127248"/>
+            <a:ext cx="2574950" cy="1609344"/>
           </a:xfrm>
           <a:prstGeom prst="rect">
             <a:avLst/>
@@ -17878,14 +18657,14 @@
                 </a:solidFill>
                 <a:latin typeface="Google Sans Flex"/>
               </a:rPr>
-              <a:t>Personas: drafts and approved customers</a:t>
+              <a:t>Persona builder: describe, generate from documents, or fill in</a:t>
             </a:r>
           </a:p>
         </p:txBody>
       </p:sp>
       <p:pic>
         <p:nvPicPr>
-          <p:cNvPr id="110" name="Picture 109" descr="scenario_detail.png"/>
+          <p:cNvPr id="110" name="Picture 109" descr="scenarios.jpg"/>
           <p:cNvPicPr>
             <a:picLocks noChangeAspect="1"/>
           </p:cNvPicPr>
@@ -17899,8 +18678,8 @@
         </p:blipFill>
         <p:spPr>
           <a:xfrm>
-            <a:off x="5308599" y="3127248"/>
-            <a:ext cx="2861056" cy="1609344"/>
+            <a:off x="5451652" y="3127248"/>
+            <a:ext cx="2574950" cy="1609344"/>
           </a:xfrm>
           <a:prstGeom prst="rect">
             <a:avLst/>
@@ -17946,7 +18725,7 @@
                 </a:solidFill>
                 <a:latin typeface="Google Sans Flex"/>
               </a:rPr>
-              <a:t>Scenario: goal, rules and rubric with citations</a:t>
+              <a:t>Scenarios: one customer, rubric and rules each</a:t>
             </a:r>
           </a:p>
         </p:txBody>

--- a/media/SkillCoach_Submission.pptx
+++ b/media/SkillCoach_Submission.pptx
@@ -10475,7 +10475,7 @@
                 </a:solidFill>
                 <a:latin typeface="Google Sans Flex"/>
               </a:rPr>
-              <a:t>Text practice with a 3D AI customer</a:t>
+              <a:t>Practice with a 3D AI customer</a:t>
             </a:r>
           </a:p>
           <a:p>
@@ -10492,7 +10492,7 @@
                 </a:solidFill>
                 <a:latin typeface="Google Sans Flex"/>
               </a:rPr>
-              <a:t>Browser voice: speech input, spoken replies</a:t>
+              <a:t>Live call: camera, hands-free voice, delivery feedback</a:t>
             </a:r>
           </a:p>
           <a:p>
@@ -17203,7 +17203,7 @@
                 </a:solidFill>
                 <a:latin typeface="Google Sans Flex SemiBold"/>
               </a:rPr>
-              <a:t>3D customer and voice</a:t>
+              <a:t>Live video call</a:t>
             </a:r>
           </a:p>
         </p:txBody>
@@ -17242,7 +17242,7 @@
                 </a:solidFill>
                 <a:latin typeface="Google Sans Flex"/>
               </a:rPr>
-              <a:t>A 3D customer that lip-syncs, blinks and shows its mood from the trust meter; speech input and spoken replies.</a:t>
+              <a:t>Camera on, hands-free voice with a 3D customer that lip-syncs and shows its mood; Gemini reviews eye contact and expression.</a:t>
             </a:r>
           </a:p>
         </p:txBody>
@@ -20867,7 +20867,7 @@
         </p:nvGraphicFramePr>
         <p:xfrm>
           <a:off x="320040" y="1207008"/>
-          <a:ext cx="5394960" cy="2633472"/>
+          <a:ext cx="5394960" cy="2798064"/>
         </p:xfrm>
         <a:graphic>
           <a:graphicData uri="http://schemas.openxmlformats.org/drawingml/2006/table">
@@ -20880,7 +20880,7 @@
                 <a:gridCol w="1097280"/>
                 <a:gridCol w="2514600"/>
               </a:tblGrid>
-              <a:tr h="329184">
+              <a:tr h="310896">
                 <a:tc>
                   <a:txBody>
                     <a:bodyPr wrap="square"/>
@@ -20948,7 +20948,7 @@
                   </a:tcPr>
                 </a:tc>
               </a:tr>
-              <a:tr h="329184">
+              <a:tr h="310896">
                 <a:tc>
                   <a:txBody>
                     <a:bodyPr wrap="square"/>
@@ -21016,7 +21016,7 @@
                   </a:tcPr>
                 </a:tc>
               </a:tr>
-              <a:tr h="329184">
+              <a:tr h="310896">
                 <a:tc>
                   <a:txBody>
                     <a:bodyPr wrap="square"/>
@@ -21084,7 +21084,7 @@
                   </a:tcPr>
                 </a:tc>
               </a:tr>
-              <a:tr h="329184">
+              <a:tr h="310896">
                 <a:tc>
                   <a:txBody>
                     <a:bodyPr wrap="square"/>
@@ -21152,7 +21152,7 @@
                   </a:tcPr>
                 </a:tc>
               </a:tr>
-              <a:tr h="329184">
+              <a:tr h="310896">
                 <a:tc>
                   <a:txBody>
                     <a:bodyPr wrap="square"/>
@@ -21220,7 +21220,7 @@
                   </a:tcPr>
                 </a:tc>
               </a:tr>
-              <a:tr h="329184">
+              <a:tr h="310896">
                 <a:tc>
                   <a:txBody>
                     <a:bodyPr wrap="square"/>
@@ -21288,7 +21288,7 @@
                   </a:tcPr>
                 </a:tc>
               </a:tr>
-              <a:tr h="329184">
+              <a:tr h="310896">
                 <a:tc>
                   <a:txBody>
                     <a:bodyPr wrap="square"/>
@@ -21356,7 +21356,7 @@
                   </a:tcPr>
                 </a:tc>
               </a:tr>
-              <a:tr h="329184">
+              <a:tr h="310896">
                 <a:tc>
                   <a:txBody>
                     <a:bodyPr wrap="square"/>
@@ -21424,6 +21424,74 @@
                   </a:tcPr>
                 </a:tc>
               </a:tr>
+              <a:tr h="310896">
+                <a:tc>
+                  <a:txBody>
+                    <a:bodyPr wrap="square"/>
+                    <a:lstStyle/>
+                    <a:p>
+                      <a:r>
+                        <a:rPr sz="850" i="0">
+                          <a:solidFill>
+                            <a:srgbClr val="202124"/>
+                          </a:solidFill>
+                          <a:latin typeface="Google Sans Flex SemiBold"/>
+                        </a:rPr>
+                        <a:t>Delivery coach (live, vision)</a:t>
+                      </a:r>
+                    </a:p>
+                  </a:txBody>
+                  <a:tcPr marL="54864" marR="54864" marT="27432" marB="27432" anchor="ctr">
+                    <a:solidFill>
+                      <a:srgbClr val="F1F3F4"/>
+                    </a:solidFill>
+                  </a:tcPr>
+                </a:tc>
+                <a:tc>
+                  <a:txBody>
+                    <a:bodyPr wrap="square"/>
+                    <a:lstStyle/>
+                    <a:p>
+                      <a:r>
+                        <a:rPr sz="850" i="0">
+                          <a:solidFill>
+                            <a:srgbClr val="188038"/>
+                          </a:solidFill>
+                          <a:latin typeface="Google Sans Flex SemiBold"/>
+                        </a:rPr>
+                        <a:t>3.5 Flash-Lite</a:t>
+                      </a:r>
+                    </a:p>
+                  </a:txBody>
+                  <a:tcPr marL="54864" marR="54864" marT="27432" marB="27432" anchor="ctr">
+                    <a:solidFill>
+                      <a:srgbClr val="F1F3F4"/>
+                    </a:solidFill>
+                  </a:tcPr>
+                </a:tc>
+                <a:tc>
+                  <a:txBody>
+                    <a:bodyPr wrap="square"/>
+                    <a:lstStyle/>
+                    <a:p>
+                      <a:r>
+                        <a:rPr sz="850" i="0">
+                          <a:solidFill>
+                            <a:srgbClr val="202124"/>
+                          </a:solidFill>
+                          <a:latin typeface="Google Sans Flex"/>
+                        </a:rPr>
+                        <a:t>One camera frame per turn, not stored; no comments on looks</a:t>
+                      </a:r>
+                    </a:p>
+                  </a:txBody>
+                  <a:tcPr marL="54864" marR="54864" marT="27432" marB="27432" anchor="ctr">
+                    <a:solidFill>
+                      <a:srgbClr val="F1F3F4"/>
+                    </a:solidFill>
+                  </a:tcPr>
+                </a:tc>
+              </a:tr>
             </a:tbl>
           </a:graphicData>
         </a:graphic>
@@ -21570,7 +21638,7 @@
                 </a:solidFill>
                 <a:latin typeface="Google Sans Flex"/>
               </a:rPr>
-              <a:t>seven agent roles via Vertex AI (google-genai SDK), structured JSON output, streaming, embeddings.</a:t>
+              <a:t>seven agent roles via Vertex AI (google-genai SDK), plus a vision check in live calls; structured JSON, streaming, embeddings.</a:t>
             </a:r>
           </a:p>
           <a:p>

--- a/media/SkillCoach_Submission.pptx
+++ b/media/SkillCoach_Submission.pptx
@@ -8453,7 +8453,7 @@
       </p:sp>
       <p:pic>
         <p:nvPicPr>
-          <p:cNvPr id="136" name="Picture 135" descr="practice_start.jpg"/>
+          <p:cNvPr id="136" name="Picture 135" descr="practice_live.jpg"/>
           <p:cNvPicPr>
             <a:picLocks noChangeAspect="1"/>
           </p:cNvPicPr>
@@ -8514,7 +8514,7 @@
                 </a:solidFill>
                 <a:latin typeface="Google Sans Flex"/>
               </a:rPr>
-              <a:t>Mr. Tan as a 3D customer: he blinks, breathes, keeps eye contact and lip-syncs. His mood follows the trust and patience meters.</a:t>
+              <a:t>A live call: Mr. Tan, animated with Veo, listens, talks and frowns as trust changes; the trainee's camera joins with a virtual background and on-device expression tracking.</a:t>
             </a:r>
           </a:p>
         </p:txBody>
@@ -10475,7 +10475,7 @@
                 </a:solidFill>
                 <a:latin typeface="Google Sans Flex"/>
               </a:rPr>
-              <a:t>Practice with a 3D AI customer</a:t>
+              <a:t>Lifelike video customers (Gemini image + Veo)</a:t>
             </a:r>
           </a:p>
           <a:p>
@@ -10702,7 +10702,7 @@
                 </a:solidFill>
                 <a:latin typeface="Google Sans Flex"/>
               </a:rPr>
-              <a:t>On-device emotion cues</a:t>
+              <a:t>Delivery trends in the report</a:t>
             </a:r>
           </a:p>
           <a:p>
@@ -14025,7 +14025,7 @@
                 </a:solidFill>
                 <a:latin typeface="Google Sans Flex"/>
               </a:rPr>
-              <a:t>The report: one high-severity violation fails the compliance gate and caps the score (28 here), however good the rest was.</a:t>
+              <a:t>The report: one high-severity violation fails the compliance gate and caps the score (37 in this recorded session), however good the rest was.</a:t>
             </a:r>
           </a:p>
         </p:txBody>
@@ -14409,7 +14409,7 @@
                 </a:solidFill>
                 <a:latin typeface="Google Sans Flex"/>
               </a:rPr>
-              <a:t>Upload manuals and policies; Gemini drafts realistic AI customers that cite the source passages. A trainer approves them, and trainees practice any time with a 3D customer and a coach on every turn.</a:t>
+              <a:t>Upload manuals and policies; Gemini drafts realistic AI customers that cite the source passages. A trainer approves them, and trainees practice any time with a lifelike video customer and a coach on every turn.</a:t>
             </a:r>
           </a:p>
         </p:txBody>
@@ -14680,7 +14680,7 @@
                 </a:solidFill>
                 <a:latin typeface="Google Sans Flex SemiBold"/>
               </a:rPr>
-              <a:t>Live app: a 3D customer, and the Guard holds a risky message</a:t>
+              <a:t>Live app: a video-call customer, and the Guard holds a risky message</a:t>
             </a:r>
           </a:p>
         </p:txBody>
@@ -14748,7 +14748,7 @@
                 </a:solidFill>
                 <a:latin typeface="Google Sans Flex"/>
               </a:rPr>
-              <a:t>Mr. Tan, a cautious retiree, is rendered as a 3D customer. The trainee types a guaranteed-return promise; the Guard quotes the phrase, names rule CC-01 and offers Edit message or Send anyway.</a:t>
+              <a:t>Mr. Tan is a fictional retiree made with Gemini image generation and Veo. The trainee types a guaranteed-return promise; the Guard quotes the phrase, names rule CC-01 and offers Edit message or Send anyway.</a:t>
             </a:r>
           </a:p>
         </p:txBody>
@@ -16153,7 +16153,7 @@
                 </a:solidFill>
                 <a:latin typeface="Google Sans Flex SemiBold"/>
               </a:rPr>
-              <a:t>Live AI customer</a:t>
+              <a:t>Lifelike AI customer</a:t>
             </a:r>
           </a:p>
         </p:txBody>
@@ -16192,7 +16192,7 @@
                 </a:solidFill>
                 <a:latin typeface="Google Sans Flex"/>
               </a:rPr>
-              <a:t>Streamed replies, hidden needs revealed only when trust is earned, facts limited to the knowledge base.</a:t>
+              <a:t>A Veo-animated person on a video call; streamed replies, hidden needs revealed only when trust is earned.</a:t>
             </a:r>
           </a:p>
         </p:txBody>
@@ -17242,7 +17242,7 @@
                 </a:solidFill>
                 <a:latin typeface="Google Sans Flex"/>
               </a:rPr>
-              <a:t>Camera on, hands-free voice with a 3D customer that lip-syncs and shows its mood; Gemini reviews eye contact and expression.</a:t>
+              <a:t>Camera with background blur or virtual backgrounds, hands-free voice, on-device emotion and eye-contact tracking, Gemini delivery tips.</a:t>
             </a:r>
           </a:p>
         </p:txBody>
@@ -18278,7 +18278,7 @@
                 </a:solidFill>
                 <a:latin typeface="Google Sans Flex"/>
               </a:rPr>
-              <a:t>Screens from the deployed app: a persona grounded in cited sources, the 3D customer with the Compliance Guard card, and the evidence-verified report.</a:t>
+              <a:t>Screens from the deployed app: a persona grounded in cited sources, the video customer with the Compliance Guard card, and the evidence-verified report.</a:t>
             </a:r>
           </a:p>
         </p:txBody>
@@ -21713,7 +21713,7 @@
                 </a:solidFill>
                 <a:latin typeface="Google Sans Flex"/>
               </a:rPr>
-              <a:t>Hosting serves the public URL and rewrites traffic to Cloud Run.</a:t>
+              <a:t>Hosting serves the public URL; Authentication handles sign-up, sign-in and guests.</a:t>
             </a:r>
           </a:p>
           <a:p>
@@ -21729,6 +21729,31 @@
                 </a:solidFill>
                 <a:latin typeface="Google Sans Flex SemiBold"/>
               </a:rPr>
+              <a:t>Veo + Gemini image: </a:t>
+            </a:r>
+            <a:r>
+              <a:rPr sz="950" i="0">
+                <a:solidFill>
+                  <a:srgbClr val="202124"/>
+                </a:solidFill>
+                <a:latin typeface="Google Sans Flex"/>
+              </a:rPr>
+              <a:t>fictional customer portraits animated into listening, talking and unhappy clips.</a:t>
+            </a:r>
+          </a:p>
+          <a:p>
+            <a:pPr algn="l">
+              <a:spcAft>
+                <a:spcPts val="600"/>
+              </a:spcAft>
+            </a:pPr>
+            <a:r>
+              <a:rPr sz="950" i="0">
+                <a:solidFill>
+                  <a:srgbClr val="1A73E8"/>
+                </a:solidFill>
+                <a:latin typeface="Google Sans Flex SemiBold"/>
+              </a:rPr>
               <a:t>Also: </a:t>
             </a:r>
             <a:r>
@@ -21738,7 +21763,7 @@
                 </a:solidFill>
                 <a:latin typeface="Google Sans Flex"/>
               </a:rPr>
-              <a:t>Python 3.12, Next.js 15, React, Server-Sent Events, Web Speech API.</a:t>
+              <a:t>Python 3.12, Next.js 15, three.js VRM avatar, MediaPipe on-device vision, Web Speech API.</a:t>
             </a:r>
           </a:p>
         </p:txBody>
